--- a/PPT/QuizCards.pptx
+++ b/PPT/QuizCards.pptx
@@ -112,6 +112,11 @@
       </a:defRPr>
     </a:lvl9pPr>
   </p:defaultTextStyle>
+  <p:extLst>
+    <p:ext uri="{EFAFB233-063F-42B5-8137-9DF3F51BA10A}">
+      <p15:sldGuideLst xmlns:p15="http://schemas.microsoft.com/office/powerpoint/2012/main"/>
+    </p:ext>
+  </p:extLst>
 </p:presentation>
 </file>
 
@@ -6545,7 +6550,7 @@
           <a:p>
             <a:fld id="{D5B4CA7A-C1A9-4338-BFC6-3C6B9031BDBD}" type="datetimeFigureOut">
               <a:rPr lang="hu-HU" smtClean="0"/>
-              <a:t>2026. 06. 01.</a:t>
+              <a:t>2026. 06. 02.</a:t>
             </a:fld>
             <a:endParaRPr lang="hu-HU"/>
           </a:p>
@@ -6743,7 +6748,7 @@
           <a:p>
             <a:fld id="{D5B4CA7A-C1A9-4338-BFC6-3C6B9031BDBD}" type="datetimeFigureOut">
               <a:rPr lang="hu-HU" smtClean="0"/>
-              <a:t>2026. 06. 01.</a:t>
+              <a:t>2026. 06. 02.</a:t>
             </a:fld>
             <a:endParaRPr lang="hu-HU"/>
           </a:p>
@@ -6951,7 +6956,7 @@
           <a:p>
             <a:fld id="{D5B4CA7A-C1A9-4338-BFC6-3C6B9031BDBD}" type="datetimeFigureOut">
               <a:rPr lang="hu-HU" smtClean="0"/>
-              <a:t>2026. 06. 01.</a:t>
+              <a:t>2026. 06. 02.</a:t>
             </a:fld>
             <a:endParaRPr lang="hu-HU"/>
           </a:p>
@@ -7149,7 +7154,7 @@
           <a:p>
             <a:fld id="{D5B4CA7A-C1A9-4338-BFC6-3C6B9031BDBD}" type="datetimeFigureOut">
               <a:rPr lang="hu-HU" smtClean="0"/>
-              <a:t>2026. 06. 01.</a:t>
+              <a:t>2026. 06. 02.</a:t>
             </a:fld>
             <a:endParaRPr lang="hu-HU"/>
           </a:p>
@@ -7424,7 +7429,7 @@
           <a:p>
             <a:fld id="{D5B4CA7A-C1A9-4338-BFC6-3C6B9031BDBD}" type="datetimeFigureOut">
               <a:rPr lang="hu-HU" smtClean="0"/>
-              <a:t>2026. 06. 01.</a:t>
+              <a:t>2026. 06. 02.</a:t>
             </a:fld>
             <a:endParaRPr lang="hu-HU"/>
           </a:p>
@@ -7689,7 +7694,7 @@
           <a:p>
             <a:fld id="{D5B4CA7A-C1A9-4338-BFC6-3C6B9031BDBD}" type="datetimeFigureOut">
               <a:rPr lang="hu-HU" smtClean="0"/>
-              <a:t>2026. 06. 01.</a:t>
+              <a:t>2026. 06. 02.</a:t>
             </a:fld>
             <a:endParaRPr lang="hu-HU"/>
           </a:p>
@@ -8101,7 +8106,7 @@
           <a:p>
             <a:fld id="{D5B4CA7A-C1A9-4338-BFC6-3C6B9031BDBD}" type="datetimeFigureOut">
               <a:rPr lang="hu-HU" smtClean="0"/>
-              <a:t>2026. 06. 01.</a:t>
+              <a:t>2026. 06. 02.</a:t>
             </a:fld>
             <a:endParaRPr lang="hu-HU"/>
           </a:p>
@@ -8242,7 +8247,7 @@
           <a:p>
             <a:fld id="{D5B4CA7A-C1A9-4338-BFC6-3C6B9031BDBD}" type="datetimeFigureOut">
               <a:rPr lang="hu-HU" smtClean="0"/>
-              <a:t>2026. 06. 01.</a:t>
+              <a:t>2026. 06. 02.</a:t>
             </a:fld>
             <a:endParaRPr lang="hu-HU"/>
           </a:p>
@@ -8355,7 +8360,7 @@
           <a:p>
             <a:fld id="{D5B4CA7A-C1A9-4338-BFC6-3C6B9031BDBD}" type="datetimeFigureOut">
               <a:rPr lang="hu-HU" smtClean="0"/>
-              <a:t>2026. 06. 01.</a:t>
+              <a:t>2026. 06. 02.</a:t>
             </a:fld>
             <a:endParaRPr lang="hu-HU"/>
           </a:p>
@@ -8666,7 +8671,7 @@
           <a:p>
             <a:fld id="{D5B4CA7A-C1A9-4338-BFC6-3C6B9031BDBD}" type="datetimeFigureOut">
               <a:rPr lang="hu-HU" smtClean="0"/>
-              <a:t>2026. 06. 01.</a:t>
+              <a:t>2026. 06. 02.</a:t>
             </a:fld>
             <a:endParaRPr lang="hu-HU"/>
           </a:p>
@@ -8954,7 +8959,7 @@
           <a:p>
             <a:fld id="{D5B4CA7A-C1A9-4338-BFC6-3C6B9031BDBD}" type="datetimeFigureOut">
               <a:rPr lang="hu-HU" smtClean="0"/>
-              <a:t>2026. 06. 01.</a:t>
+              <a:t>2026. 06. 02.</a:t>
             </a:fld>
             <a:endParaRPr lang="hu-HU"/>
           </a:p>
@@ -9198,7 +9203,7 @@
           <a:p>
             <a:fld id="{D5B4CA7A-C1A9-4338-BFC6-3C6B9031BDBD}" type="datetimeFigureOut">
               <a:rPr lang="hu-HU" smtClean="0"/>
-              <a:t>2026. 06. 01.</a:t>
+              <a:t>2026. 06. 02.</a:t>
             </a:fld>
             <a:endParaRPr lang="hu-HU"/>
           </a:p>
@@ -9825,6 +9830,42 @@
           </a:fontRef>
         </p:style>
       </p:cxnSp>
+      <p:pic>
+        <p:nvPicPr>
+          <p:cNvPr id="2" name="Kép 1">
+            <a:extLst>
+              <a:ext uri="{FF2B5EF4-FFF2-40B4-BE49-F238E27FC236}">
+                <a16:creationId xmlns:a16="http://schemas.microsoft.com/office/drawing/2014/main" id="{FF999059-AD0D-4402-0A33-7FFB2A467B98}"/>
+              </a:ext>
+            </a:extLst>
+          </p:cNvPr>
+          <p:cNvPicPr>
+            <a:picLocks noChangeAspect="1"/>
+          </p:cNvPicPr>
+          <p:nvPr/>
+        </p:nvPicPr>
+        <p:blipFill>
+          <a:blip r:embed="rId3">
+            <a:extLst>
+              <a:ext uri="{28A0092B-C50C-407E-A947-70E740481C1C}">
+                <a14:useLocalDpi xmlns:a14="http://schemas.microsoft.com/office/drawing/2010/main" val="0"/>
+              </a:ext>
+            </a:extLst>
+          </a:blip>
+          <a:stretch>
+            <a:fillRect/>
+          </a:stretch>
+        </p:blipFill>
+        <p:spPr>
+          <a:xfrm>
+            <a:off x="10169753" y="-1"/>
+            <a:ext cx="2022247" cy="2022247"/>
+          </a:xfrm>
+          <a:prstGeom prst="rect">
+            <a:avLst/>
+          </a:prstGeom>
+        </p:spPr>
+      </p:pic>
     </p:spTree>
     <p:extLst>
       <p:ext uri="{BB962C8B-B14F-4D97-AF65-F5344CB8AC3E}">
